--- a/output/package-staging/OJGuard/output/submission/OJGuard_项目介绍.pptx
+++ b/output/package-staging/OJGuard/output/submission/OJGuard_项目介绍.pptx
@@ -2,30 +2,30 @@
 <file path=ppt/presentation.xml><?xml version="1.0" encoding="utf-8"?>
 <p:presentation xmlns:p="http://schemas.openxmlformats.org/presentationml/2006/main">
   <p:sldMasterIdLst>
-    <p:sldMasterId xmlns:r="http://schemas.openxmlformats.org/officeDocument/2006/relationships" id="2147483648" r:id="R56d4aff703df4cd8"/>
-    <p:sldMasterId xmlns:r="http://schemas.openxmlformats.org/officeDocument/2006/relationships" id="2147483650" r:id="Rc7ad0d5d0e3a4ddc"/>
+    <p:sldMasterId xmlns:r="http://schemas.openxmlformats.org/officeDocument/2006/relationships" id="2147483648" r:id="Ra43803f967404ae5"/>
+    <p:sldMasterId xmlns:r="http://schemas.openxmlformats.org/officeDocument/2006/relationships" id="2147483650" r:id="R92658c703d4146dd"/>
   </p:sldMasterIdLst>
   <p:notesMasterIdLst>
-    <p:notesMasterId xmlns:r="http://schemas.openxmlformats.org/officeDocument/2006/relationships" r:id="R1db8b61816d1463d"/>
+    <p:notesMasterId xmlns:r="http://schemas.openxmlformats.org/officeDocument/2006/relationships" r:id="R5fed07392c864a5d"/>
   </p:notesMasterIdLst>
   <p:sldIdLst>
-    <p:sldId xmlns:r="http://schemas.openxmlformats.org/officeDocument/2006/relationships" id="256" r:id="Re7ede31cb536490c"/>
-    <p:sldId xmlns:r="http://schemas.openxmlformats.org/officeDocument/2006/relationships" id="257" r:id="R0974be257d144fe9"/>
-    <p:sldId xmlns:r="http://schemas.openxmlformats.org/officeDocument/2006/relationships" id="258" r:id="Rb43ed31397244b32"/>
-    <p:sldId xmlns:r="http://schemas.openxmlformats.org/officeDocument/2006/relationships" id="259" r:id="R0d45b4782d3b46d6"/>
-    <p:sldId xmlns:r="http://schemas.openxmlformats.org/officeDocument/2006/relationships" id="260" r:id="R1194fe1a7b5a4d02"/>
-    <p:sldId xmlns:r="http://schemas.openxmlformats.org/officeDocument/2006/relationships" id="261" r:id="Rd1a83d816dad4b1b"/>
-    <p:sldId xmlns:r="http://schemas.openxmlformats.org/officeDocument/2006/relationships" id="262" r:id="R67ce165b91124521"/>
-    <p:sldId xmlns:r="http://schemas.openxmlformats.org/officeDocument/2006/relationships" id="263" r:id="Ra71cd063790d4b1d"/>
-    <p:sldId xmlns:r="http://schemas.openxmlformats.org/officeDocument/2006/relationships" id="264" r:id="Rc4973ef534044d9c"/>
-    <p:sldId xmlns:r="http://schemas.openxmlformats.org/officeDocument/2006/relationships" id="265" r:id="Rc2f285bcf18245f5"/>
-    <p:sldId xmlns:r="http://schemas.openxmlformats.org/officeDocument/2006/relationships" id="266" r:id="Ra498f14d4f934092"/>
-    <p:sldId xmlns:r="http://schemas.openxmlformats.org/officeDocument/2006/relationships" id="267" r:id="R60d139b5ac834831"/>
-    <p:sldId xmlns:r="http://schemas.openxmlformats.org/officeDocument/2006/relationships" id="268" r:id="R8df0c28437b74ddf"/>
-    <p:sldId xmlns:r="http://schemas.openxmlformats.org/officeDocument/2006/relationships" id="269" r:id="R45bc7c83634c483a"/>
-    <p:sldId xmlns:r="http://schemas.openxmlformats.org/officeDocument/2006/relationships" id="270" r:id="Re90c07ccaab04cb0"/>
-    <p:sldId xmlns:r="http://schemas.openxmlformats.org/officeDocument/2006/relationships" id="271" r:id="R21f5e5e06a044ef8"/>
-    <p:sldId xmlns:r="http://schemas.openxmlformats.org/officeDocument/2006/relationships" id="272" r:id="Rae2e45856ee94f30"/>
+    <p:sldId xmlns:r="http://schemas.openxmlformats.org/officeDocument/2006/relationships" id="256" r:id="Raa16b0bae69a4a01"/>
+    <p:sldId xmlns:r="http://schemas.openxmlformats.org/officeDocument/2006/relationships" id="257" r:id="R16735701427341f8"/>
+    <p:sldId xmlns:r="http://schemas.openxmlformats.org/officeDocument/2006/relationships" id="258" r:id="R324f1848d7a24f4d"/>
+    <p:sldId xmlns:r="http://schemas.openxmlformats.org/officeDocument/2006/relationships" id="259" r:id="R874e367df3f5485a"/>
+    <p:sldId xmlns:r="http://schemas.openxmlformats.org/officeDocument/2006/relationships" id="260" r:id="Rf2ae0518bc5d4d82"/>
+    <p:sldId xmlns:r="http://schemas.openxmlformats.org/officeDocument/2006/relationships" id="261" r:id="R44ad51bc4c8e41ba"/>
+    <p:sldId xmlns:r="http://schemas.openxmlformats.org/officeDocument/2006/relationships" id="262" r:id="R37edf42cfdb04282"/>
+    <p:sldId xmlns:r="http://schemas.openxmlformats.org/officeDocument/2006/relationships" id="263" r:id="Ra12ff4b3825f4532"/>
+    <p:sldId xmlns:r="http://schemas.openxmlformats.org/officeDocument/2006/relationships" id="264" r:id="R014d9fb02b9a44a3"/>
+    <p:sldId xmlns:r="http://schemas.openxmlformats.org/officeDocument/2006/relationships" id="265" r:id="R39a7bb5922d14569"/>
+    <p:sldId xmlns:r="http://schemas.openxmlformats.org/officeDocument/2006/relationships" id="266" r:id="R8671f02ff216463f"/>
+    <p:sldId xmlns:r="http://schemas.openxmlformats.org/officeDocument/2006/relationships" id="267" r:id="R4bb914c9a245411e"/>
+    <p:sldId xmlns:r="http://schemas.openxmlformats.org/officeDocument/2006/relationships" id="268" r:id="Rfdb447c9b6a54923"/>
+    <p:sldId xmlns:r="http://schemas.openxmlformats.org/officeDocument/2006/relationships" id="269" r:id="R8f630a2706bf446e"/>
+    <p:sldId xmlns:r="http://schemas.openxmlformats.org/officeDocument/2006/relationships" id="270" r:id="R58202fdfb4734ee0"/>
+    <p:sldId xmlns:r="http://schemas.openxmlformats.org/officeDocument/2006/relationships" id="271" r:id="R7f6060eddeda4f8c"/>
+    <p:sldId xmlns:r="http://schemas.openxmlformats.org/officeDocument/2006/relationships" id="272" r:id="Rbdfa4c6bcb344e38"/>
   </p:sldIdLst>
   <p:sldSz cx="12192000" cy="6858000"/>
   <p:notesSz cx="6858000" cy="9144000"/>
@@ -606,7 +606,21 @@
         <p:txBody>
           <a:bodyPr xmlns:a="http://schemas.openxmlformats.org/drawingml/2006/main"/>
           <a:lstStyle xmlns:a="http://schemas.openxmlformats.org/drawingml/2006/main"/>
-          <a:p xmlns:a="http://schemas.openxmlformats.org/drawingml/2006/main"/>
+          <a:p xmlns:a="http://schemas.openxmlformats.org/drawingml/2006/main">
+            <a:r>
+              <a:t>[Sources]</a:t>
+            </a:r>
+          </a:p>
+          <a:p xmlns:a="http://schemas.openxmlformats.org/drawingml/2006/main">
+            <a:r>
+              <a:t>OJGuard materials/MCP_工具契约与迁移说明.md</a:t>
+            </a:r>
+          </a:p>
+          <a:p xmlns:a="http://schemas.openxmlformats.org/drawingml/2006/main">
+            <a:r>
+              <a:t>OJGuard tests/test_agentteams_runtime_control.py</a:t>
+            </a:r>
+          </a:p>
         </p:txBody>
       </p:sp>
       <p:sp>
@@ -749,7 +763,26 @@
         <p:txBody>
           <a:bodyPr xmlns:a="http://schemas.openxmlformats.org/drawingml/2006/main"/>
           <a:lstStyle xmlns:a="http://schemas.openxmlformats.org/drawingml/2006/main"/>
-          <a:p xmlns:a="http://schemas.openxmlformats.org/drawingml/2006/main"/>
+          <a:p xmlns:a="http://schemas.openxmlformats.org/drawingml/2006/main">
+            <a:r>
+              <a:t>[Sources]</a:t>
+            </a:r>
+          </a:p>
+          <a:p xmlns:a="http://schemas.openxmlformats.org/drawingml/2006/main">
+            <a:r>
+              <a:t>OJGuard output/evidence/java-runtime-comparison.json</a:t>
+            </a:r>
+          </a:p>
+          <a:p xmlns:a="http://schemas.openxmlformats.org/drawingml/2006/main">
+            <a:r>
+              <a:t>OJGuard output/evidence/agentteams/agentteams-demo-result.json</a:t>
+            </a:r>
+          </a:p>
+          <a:p xmlns:a="http://schemas.openxmlformats.org/drawingml/2006/main">
+            <a:r>
+              <a:t>OJGuard output/evidence/agentteams/deterministic-recovery-evidence.json</a:t>
+            </a:r>
+          </a:p>
         </p:txBody>
       </p:sp>
       <p:sp>
@@ -892,7 +925,21 @@
         <p:txBody>
           <a:bodyPr xmlns:a="http://schemas.openxmlformats.org/drawingml/2006/main"/>
           <a:lstStyle xmlns:a="http://schemas.openxmlformats.org/drawingml/2006/main"/>
-          <a:p xmlns:a="http://schemas.openxmlformats.org/drawingml/2006/main"/>
+          <a:p xmlns:a="http://schemas.openxmlformats.org/drawingml/2006/main">
+            <a:r>
+              <a:t>[Sources]</a:t>
+            </a:r>
+          </a:p>
+          <a:p xmlns:a="http://schemas.openxmlformats.org/drawingml/2006/main">
+            <a:r>
+              <a:t>OJGuard README.md</a:t>
+            </a:r>
+          </a:p>
+          <a:p xmlns:a="http://schemas.openxmlformats.org/drawingml/2006/main">
+            <a:r>
+              <a:t>OJGuard output/evidence/agentteams/deterministic-recovery-evidence.json</a:t>
+            </a:r>
+          </a:p>
         </p:txBody>
       </p:sp>
       <p:sp>
@@ -1035,7 +1082,26 @@
         <p:txBody>
           <a:bodyPr xmlns:a="http://schemas.openxmlformats.org/drawingml/2006/main"/>
           <a:lstStyle xmlns:a="http://schemas.openxmlformats.org/drawingml/2006/main"/>
-          <a:p xmlns:a="http://schemas.openxmlformats.org/drawingml/2006/main"/>
+          <a:p xmlns:a="http://schemas.openxmlformats.org/drawingml/2006/main">
+            <a:r>
+              <a:t>[Sources]</a:t>
+            </a:r>
+          </a:p>
+          <a:p xmlns:a="http://schemas.openxmlformats.org/drawingml/2006/main">
+            <a:r>
+              <a:t>OJGuard output/evidence/agentteams/agentteams-demo-result.json</a:t>
+            </a:r>
+          </a:p>
+          <a:p xmlns:a="http://schemas.openxmlformats.org/drawingml/2006/main">
+            <a:r>
+              <a:t>OJGuard output/evidence/agentteams/deterministic-recovery-evidence.json</a:t>
+            </a:r>
+          </a:p>
+          <a:p xmlns:a="http://schemas.openxmlformats.org/drawingml/2006/main">
+            <a:r>
+              <a:t>OJGuard output/evidence/incidents/runtime-regression-report.json</a:t>
+            </a:r>
+          </a:p>
         </p:txBody>
       </p:sp>
       <p:sp>
@@ -1596,7 +1662,26 @@
         <p:txBody>
           <a:bodyPr xmlns:a="http://schemas.openxmlformats.org/drawingml/2006/main"/>
           <a:lstStyle xmlns:a="http://schemas.openxmlformats.org/drawingml/2006/main"/>
-          <a:p xmlns:a="http://schemas.openxmlformats.org/drawingml/2006/main"/>
+          <a:p xmlns:a="http://schemas.openxmlformats.org/drawingml/2006/main">
+            <a:r>
+              <a:t>[Sources]</a:t>
+            </a:r>
+          </a:p>
+          <a:p xmlns:a="http://schemas.openxmlformats.org/drawingml/2006/main">
+            <a:r>
+              <a:t>OJGuard output/evidence/agentteams/agentteams-demo-result.json</a:t>
+            </a:r>
+          </a:p>
+          <a:p xmlns:a="http://schemas.openxmlformats.org/drawingml/2006/main">
+            <a:r>
+              <a:t>OJGuard output/evidence/agentteams/deterministic-recovery-evidence.json</a:t>
+            </a:r>
+          </a:p>
+          <a:p xmlns:a="http://schemas.openxmlformats.org/drawingml/2006/main">
+            <a:r>
+              <a:t>OJGuard materials/evidence/AgentTeams_真实运行证据.md</a:t>
+            </a:r>
+          </a:p>
         </p:txBody>
       </p:sp>
       <p:sp>
@@ -1689,7 +1774,7 @@
   </p:cSld>
   <p:clrMap bg1="lt1" tx1="dk1" bg2="lt2" tx2="dk2" accent1="accent1" accent2="accent2" accent3="accent3" accent4="accent4" accent5="accent5" accent6="accent6" hlink="hlink" folHlink="folHlink"/>
   <p:sldLayoutIdLst>
-    <p:sldLayoutId xmlns:r="http://schemas.openxmlformats.org/officeDocument/2006/relationships" id="2147483649" r:id="Rdca4be874d314e2d"/>
+    <p:sldLayoutId xmlns:r="http://schemas.openxmlformats.org/officeDocument/2006/relationships" id="2147483649" r:id="R725d5733c595495f"/>
   </p:sldLayoutIdLst>
   <p:hf sldNum="0" hdr="0" ftr="0" dt="0"/>
   <p:txStyles>
@@ -1972,7 +2057,7 @@
   </p:cSld>
   <p:clrMap bg1="lt1" tx1="dk1" bg2="lt2" tx2="dk2" accent1="accent1" accent2="accent2" accent3="accent3" accent4="accent4" accent5="accent5" accent6="accent6" hlink="hlink" folHlink="folHlink"/>
   <p:sldLayoutIdLst>
-    <p:sldLayoutId xmlns:r="http://schemas.openxmlformats.org/officeDocument/2006/relationships" id="2147483651" r:id="R3359df0287a244ff"/>
+    <p:sldLayoutId xmlns:r="http://schemas.openxmlformats.org/officeDocument/2006/relationships" id="2147483651" r:id="Ra4bb9d9eab9341a9"/>
   </p:sldLayoutIdLst>
   <p:hf sldNum="0" hdr="0" ftr="0" dt="0"/>
   <p:txStyles>
@@ -3632,7 +3717,7 @@
                 <a:ea typeface="微软雅黑"/>
                 <a:cs typeface="微软雅黑"/>
               </a:rPr>
-              <a:t>Skill 统一声明输入输出、依赖、失败处理与审批边界；12 个 MCP 工具提供可测试的确定性事实与动作。</a:t>
+              <a:t>9 个 Skill 定义协作边界；12 个 MCP 工具支持候选实验与版本化恢复，确定性状态机拒绝合同外路由和越权执行。</a:t>
             </a:r>
           </a:p>
         </p:txBody>
@@ -3646,10 +3731,10 @@
           <p:nvPr/>
         </p:nvPicPr>
         <p:blipFill>
-          <a:blip xmlns:r="http://schemas.openxmlformats.org/officeDocument/2006/relationships" xmlns:a="http://schemas.openxmlformats.org/drawingml/2006/main" r:embed="R30c56f9ec2084dd7">
+          <a:blip xmlns:r="http://schemas.openxmlformats.org/officeDocument/2006/relationships" xmlns:a="http://schemas.openxmlformats.org/drawingml/2006/main" r:embed="Ra1bd4e9a2e004a75">
             <a:extLst>
               <a:ext uri="{96DAC541-7B7A-43D3-8B79-37D633B846F1}">
-                <asvg:svgBlip xmlns:asvg="http://schemas.microsoft.com/office/drawing/2016/SVG/main" r:embed="Rfa6cc4632c16479c"/>
+                <asvg:svgBlip xmlns:asvg="http://schemas.microsoft.com/office/drawing/2016/SVG/main" r:embed="Ra939cc892abc4835"/>
               </a:ext>
             </a:extLst>
           </a:blip>
@@ -4183,7 +4268,7 @@
                 <a:ea typeface="微软雅黑"/>
                 <a:cs typeface="微软雅黑"/>
               </a:rPr>
-              <a:t>真实 Java Runner 对照、审批轨迹、分批重评与关闭核验共同组成可审计证据；报告可导出 JSON / HTML。</a:t>
+              <a:t>真实 AgentTeams 证明 6 个 Worker 参与；零成本证据验证 3 候选补选与灰度恢复；两类证据分级、不混淆。</a:t>
             </a:r>
           </a:p>
         </p:txBody>
@@ -4197,7 +4282,7 @@
           <p:nvPr/>
         </p:nvPicPr>
         <p:blipFill>
-          <a:blip xmlns:r="http://schemas.openxmlformats.org/officeDocument/2006/relationships" xmlns:a="http://schemas.openxmlformats.org/drawingml/2006/main" r:embed="Ra835c0da1cde469d"/>
+          <a:blip xmlns:r="http://schemas.openxmlformats.org/officeDocument/2006/relationships" xmlns:a="http://schemas.openxmlformats.org/drawingml/2006/main" r:embed="Rd72c1ca8a9a34901"/>
           <a:stretch xmlns:a="http://schemas.openxmlformats.org/drawingml/2006/main"/>
         </p:blipFill>
         <p:spPr>
@@ -4219,7 +4304,7 @@
           <p:nvPr/>
         </p:nvPicPr>
         <p:blipFill>
-          <a:blip xmlns:r="http://schemas.openxmlformats.org/officeDocument/2006/relationships" xmlns:a="http://schemas.openxmlformats.org/drawingml/2006/main" r:embed="R170ed41c45414b9b"/>
+          <a:blip xmlns:r="http://schemas.openxmlformats.org/officeDocument/2006/relationships" xmlns:a="http://schemas.openxmlformats.org/drawingml/2006/main" r:embed="R6ffb83624c8f46eb"/>
           <a:stretch xmlns:a="http://schemas.openxmlformats.org/drawingml/2006/main"/>
         </p:blipFill>
         <p:spPr>
@@ -4241,7 +4326,7 @@
           <p:nvPr/>
         </p:nvPicPr>
         <p:blipFill>
-          <a:blip xmlns:r="http://schemas.openxmlformats.org/officeDocument/2006/relationships" xmlns:a="http://schemas.openxmlformats.org/drawingml/2006/main" r:embed="R76d3efa43d4444bc"/>
+          <a:blip xmlns:r="http://schemas.openxmlformats.org/officeDocument/2006/relationships" xmlns:a="http://schemas.openxmlformats.org/drawingml/2006/main" r:embed="R04c0197f44e64a51"/>
           <a:stretch xmlns:a="http://schemas.openxmlformats.org/drawingml/2006/main"/>
         </p:blipFill>
         <p:spPr>
@@ -4263,10 +4348,10 @@
           <p:nvPr/>
         </p:nvPicPr>
         <p:blipFill>
-          <a:blip xmlns:r="http://schemas.openxmlformats.org/officeDocument/2006/relationships" xmlns:a="http://schemas.openxmlformats.org/drawingml/2006/main" r:embed="Rb7e9e34f06264d0c">
+          <a:blip xmlns:r="http://schemas.openxmlformats.org/officeDocument/2006/relationships" xmlns:a="http://schemas.openxmlformats.org/drawingml/2006/main" r:embed="Ra172a86ae0814556">
             <a:extLst>
               <a:ext uri="{96DAC541-7B7A-43D3-8B79-37D633B846F1}">
-                <asvg:svgBlip xmlns:asvg="http://schemas.microsoft.com/office/drawing/2016/SVG/main" r:embed="Ref857fa9777f4418"/>
+                <asvg:svgBlip xmlns:asvg="http://schemas.microsoft.com/office/drawing/2016/SVG/main" r:embed="Ra1eca6bb54c148a2"/>
               </a:ext>
             </a:extLst>
           </a:blip>
@@ -5490,7 +5575,7 @@
                 <a:ea typeface="微软雅黑"/>
                 <a:cs typeface="微软雅黑"/>
               </a:rPr>
-              <a:t>Docker Compose 或本地启动</a:t>
+              <a:t>PowerShell 脚本或本地启动</a:t>
             </a:r>
           </a:p>
         </p:txBody>
@@ -5684,7 +5769,7 @@
                 <a:ea typeface="微软雅黑"/>
                 <a:cs typeface="微软雅黑"/>
               </a:rPr>
-              <a:t>Runner、AgentTeams、事故报告</a:t>
+              <a:t>Runner、AgentRun、动态路由与恢复</a:t>
             </a:r>
           </a:p>
         </p:txBody>
@@ -5729,7 +5814,7 @@
                 <a:ea typeface="微软雅黑"/>
                 <a:cs typeface="微软雅黑"/>
               </a:rPr>
-              <a:t>均随提交附件提供</a:t>
+              <a:t>真实协作 + 零成本异常链证据</a:t>
             </a:r>
           </a:p>
         </p:txBody>
@@ -6318,7 +6403,7 @@
         <p:spPr>
           <a:xfrm xmlns:a="http://schemas.openxmlformats.org/drawingml/2006/main">
             <a:off x="594360" y="1298575"/>
-            <a:ext cx="8013065" cy="640080"/>
+            <a:ext cx="8013065" cy="914400"/>
           </a:xfrm>
           <a:prstGeom xmlns:a="http://schemas.openxmlformats.org/drawingml/2006/main" prst="rect">
             <a:avLst/>
@@ -6332,7 +6417,7 @@
           <a:lstStyle xmlns:a="http://schemas.openxmlformats.org/drawingml/2006/main"/>
           <a:p xmlns:a="http://schemas.openxmlformats.org/drawingml/2006/main">
             <a:r>
-              <a:t>创建事故 → 角色审批 → 控制组 → 灰度 → 全量重评 → 关闭核验；浏览器端已完成全链路实测。</a:t>
+              <a:t>真实协作从 TRIAGING 推进至 RESOLVED；确定性证据补齐“3 候选→补选实验”和“灰度失败→新计划→重审批→恢复灰度”，63 项测试全部通过。</a:t>
             </a:r>
           </a:p>
         </p:txBody>
@@ -6346,7 +6431,7 @@
           <p:nvPr/>
         </p:nvPicPr>
         <p:blipFill>
-          <a:blip xmlns:r="http://schemas.openxmlformats.org/officeDocument/2006/relationships" xmlns:a="http://schemas.openxmlformats.org/drawingml/2006/main" r:embed="R82960953624f4ff5"/>
+          <a:blip xmlns:r="http://schemas.openxmlformats.org/officeDocument/2006/relationships" xmlns:a="http://schemas.openxmlformats.org/drawingml/2006/main" r:embed="Reb5bd19c6af840ec"/>
           <a:stretch xmlns:a="http://schemas.openxmlformats.org/drawingml/2006/main"/>
         </p:blipFill>
         <p:spPr>
@@ -6368,10 +6453,10 @@
           <p:nvPr/>
         </p:nvPicPr>
         <p:blipFill>
-          <a:blip xmlns:r="http://schemas.openxmlformats.org/officeDocument/2006/relationships" xmlns:a="http://schemas.openxmlformats.org/drawingml/2006/main" r:embed="R528f06c9aae94691">
+          <a:blip xmlns:r="http://schemas.openxmlformats.org/officeDocument/2006/relationships" xmlns:a="http://schemas.openxmlformats.org/drawingml/2006/main" r:embed="Re2ed4d61c1ee4346">
             <a:extLst>
               <a:ext uri="{96DAC541-7B7A-43D3-8B79-37D633B846F1}">
-                <asvg:svgBlip xmlns:asvg="http://schemas.microsoft.com/office/drawing/2016/SVG/main" r:embed="R523ba770df2041b0"/>
+                <asvg:svgBlip xmlns:asvg="http://schemas.microsoft.com/office/drawing/2016/SVG/main" r:embed="Rdd29f046c97a463d"/>
               </a:ext>
             </a:extLst>
           </a:blip>
@@ -7620,7 +7705,7 @@
                 <a:ea typeface="微软雅黑"/>
                 <a:cs typeface="微软雅黑"/>
               </a:rPr>
-              <a:t>后端、Vue3 前端、AgentTeams</a:t>
+              <a:t>后端、Vue3 前端、AgentTeams 动态路由与恢复</a:t>
             </a:r>
           </a:p>
         </p:txBody>
@@ -7665,7 +7750,7 @@
                 <a:ea typeface="微软雅黑"/>
                 <a:cs typeface="微软雅黑"/>
               </a:rPr>
-              <a:t>三类场景与运行证据均可复现</a:t>
+              <a:t>63 项测试 + 两类协作证据可复核</a:t>
             </a:r>
           </a:p>
         </p:txBody>
@@ -9558,10 +9643,10 @@
           <p:nvPr/>
         </p:nvPicPr>
         <p:blipFill>
-          <a:blip xmlns:r="http://schemas.openxmlformats.org/officeDocument/2006/relationships" xmlns:a="http://schemas.openxmlformats.org/drawingml/2006/main" r:embed="Rb59f1243e7a74a3c">
+          <a:blip xmlns:r="http://schemas.openxmlformats.org/officeDocument/2006/relationships" xmlns:a="http://schemas.openxmlformats.org/drawingml/2006/main" r:embed="R3ee35b140d7a4b44">
             <a:extLst>
               <a:ext uri="{96DAC541-7B7A-43D3-8B79-37D633B846F1}">
-                <asvg:svgBlip xmlns:asvg="http://schemas.microsoft.com/office/drawing/2016/SVG/main" r:embed="Rb76c0fa446244143"/>
+                <asvg:svgBlip xmlns:asvg="http://schemas.microsoft.com/office/drawing/2016/SVG/main" r:embed="R46a1a4295bbb4ce9"/>
               </a:ext>
             </a:extLst>
           </a:blip>
@@ -9586,10 +9671,10 @@
           <p:nvPr/>
         </p:nvPicPr>
         <p:blipFill>
-          <a:blip xmlns:r="http://schemas.openxmlformats.org/officeDocument/2006/relationships" xmlns:a="http://schemas.openxmlformats.org/drawingml/2006/main" r:embed="Rafe34b305c2d4e21">
+          <a:blip xmlns:r="http://schemas.openxmlformats.org/officeDocument/2006/relationships" xmlns:a="http://schemas.openxmlformats.org/drawingml/2006/main" r:embed="Rf07eab4f04564b13">
             <a:extLst>
               <a:ext uri="{96DAC541-7B7A-43D3-8B79-37D633B846F1}">
-                <asvg:svgBlip xmlns:asvg="http://schemas.microsoft.com/office/drawing/2016/SVG/main" r:embed="R0213e74a1893419b"/>
+                <asvg:svgBlip xmlns:asvg="http://schemas.microsoft.com/office/drawing/2016/SVG/main" r:embed="R91e3f37dcc28463b"/>
               </a:ext>
             </a:extLst>
           </a:blip>
@@ -9969,7 +10054,7 @@
                 <a:ea typeface="微软雅黑"/>
                 <a:cs typeface="微软雅黑"/>
               </a:rPr>
-              <a:t>从异常信号到 RESOLVED：Agent 负责协同与解释，确定性工具负责事实与执行。</a:t>
+              <a:t>共享 IncidentContext 生成合法 RouteOption；Manager 选择实验，AgentRun/Event 按序记录路由、工具、门禁与状态。</a:t>
             </a:r>
           </a:p>
         </p:txBody>
@@ -9983,10 +10068,10 @@
           <p:nvPr/>
         </p:nvPicPr>
         <p:blipFill>
-          <a:blip xmlns:r="http://schemas.openxmlformats.org/officeDocument/2006/relationships" xmlns:a="http://schemas.openxmlformats.org/drawingml/2006/main" r:embed="R552e40f1908d4ad7">
+          <a:blip xmlns:r="http://schemas.openxmlformats.org/officeDocument/2006/relationships" xmlns:a="http://schemas.openxmlformats.org/drawingml/2006/main" r:embed="R370d09dd634b43f2">
             <a:extLst>
               <a:ext uri="{96DAC541-7B7A-43D3-8B79-37D633B846F1}">
-                <asvg:svgBlip xmlns:asvg="http://schemas.microsoft.com/office/drawing/2016/SVG/main" r:embed="R6075512e1d4b4633"/>
+                <asvg:svgBlip xmlns:asvg="http://schemas.microsoft.com/office/drawing/2016/SVG/main" r:embed="R003c4595618e41df"/>
               </a:ext>
             </a:extLst>
           </a:blip>
@@ -10520,7 +10605,7 @@
                 <a:ea typeface="微软雅黑"/>
                 <a:cs typeface="微软雅黑"/>
               </a:rPr>
-              <a:t>Team Leader 编排 6 个专职 Worker；共享事故状态，证据冲突则回退，高风险执行必须经过人工批准。</a:t>
+              <a:t>3 个实验候选可补选；灰度失败进入 PAUSED，经新计划与重新审批恢复；真实协作已完成 20 条响应。</a:t>
             </a:r>
           </a:p>
         </p:txBody>
@@ -10534,10 +10619,10 @@
           <p:nvPr/>
         </p:nvPicPr>
         <p:blipFill>
-          <a:blip xmlns:r="http://schemas.openxmlformats.org/officeDocument/2006/relationships" xmlns:a="http://schemas.openxmlformats.org/drawingml/2006/main" r:embed="R7d316c59bfc54073">
+          <a:blip xmlns:r="http://schemas.openxmlformats.org/officeDocument/2006/relationships" xmlns:a="http://schemas.openxmlformats.org/drawingml/2006/main" r:embed="Rfb74e7c83d71485d">
             <a:extLst>
               <a:ext uri="{96DAC541-7B7A-43D3-8B79-37D633B846F1}">
-                <asvg:svgBlip xmlns:asvg="http://schemas.microsoft.com/office/drawing/2016/SVG/main" r:embed="R9ab1097722384a2c"/>
+                <asvg:svgBlip xmlns:asvg="http://schemas.microsoft.com/office/drawing/2016/SVG/main" r:embed="R25833540e58b4c94"/>
               </a:ext>
             </a:extLst>
           </a:blip>
@@ -10562,10 +10647,10 @@
           <p:nvPr/>
         </p:nvPicPr>
         <p:blipFill>
-          <a:blip xmlns:r="http://schemas.openxmlformats.org/officeDocument/2006/relationships" xmlns:a="http://schemas.openxmlformats.org/drawingml/2006/main" r:embed="R54b8ef8f8bc14903">
+          <a:blip xmlns:r="http://schemas.openxmlformats.org/officeDocument/2006/relationships" xmlns:a="http://schemas.openxmlformats.org/drawingml/2006/main" r:embed="R659e0591b6b74290">
             <a:extLst>
               <a:ext uri="{96DAC541-7B7A-43D3-8B79-37D633B846F1}">
-                <asvg:svgBlip xmlns:asvg="http://schemas.microsoft.com/office/drawing/2016/SVG/main" r:embed="R493d9f204f594d3b"/>
+                <asvg:svgBlip xmlns:asvg="http://schemas.microsoft.com/office/drawing/2016/SVG/main" r:embed="R325c0a9d71944f46"/>
               </a:ext>
             </a:extLst>
           </a:blip>
